--- a/dist/weeks-2학기/서비스디자인_2학기_07주차_겹치는화면과중간보고서.pptx
+++ b/dist/weeks-2학기/서비스디자인_2학기_07주차_겹치는화면과중간보고서.pptx
@@ -1319,7 +1319,7 @@
 다음 주에는 보고서를 보면서 한 사람씩 짧게 이야기하겠습니다. 발표 준비는 따로 안 하셔도 됩니다. 보고서를 띄워 놓고 묻는 자리예요.
 질문 있으신 분?
 [운영 메모]
-제출 형식(PDF + 링크, 파일 이름)을 반드시 말로 한 번 더 못 박을 것. 매년 한쪽만 내는 학생이 나온다. 8주차는 발표가 아니라 보고서를 띄워 놓고 묻는 방식임을 미리 알려 부담을 줄인다.</a:t>
+제출 형식(PDF + 링크, 파일 이름)을 반드시 말로 한 번 더 못 박을 것. 매년 한쪽만 내는 학생이 나온다. 중간평가는 발표가 아니라 보고서를 띄워 놓고 묻는 방식임을 미리 알려 부담을 줄인다.</a:t>
             </a:r>
             <a:endParaRPr lang="en-US" dirty="0"/>
           </a:p>
@@ -2572,7 +2572,7 @@
                 <a:ea typeface="Pretendard" pitchFamily="34" charset="-122"/>
                 <a:cs typeface="Pretendard" pitchFamily="34" charset="-120"/>
               </a:rPr>
-              <a:t>WEEK 07</a:t>
+              <a:t>WEEK 08</a:t>
             </a:r>
             <a:endParaRPr lang="en-US" sz="900" dirty="0"/>
           </a:p>
@@ -2636,7 +2636,7 @@
                 <a:ea typeface="Pretendard SemiBold" pitchFamily="34" charset="-122"/>
                 <a:cs typeface="Pretendard SemiBold" pitchFamily="34" charset="-120"/>
               </a:rPr>
-              <a:t>07</a:t>
+              <a:t>08</a:t>
             </a:r>
             <a:endParaRPr lang="en-US" sz="13200" dirty="0"/>
           </a:p>
@@ -2744,7 +2744,7 @@
                 <a:ea typeface="Pretendard" pitchFamily="34" charset="-122"/>
                 <a:cs typeface="Pretendard" pitchFamily="34" charset="-120"/>
               </a:rPr>
-              <a:t>WEEK 07  ·  PHASE 2 화면</a:t>
+              <a:t>WEEK 08  ·  PHASE 2 화면</a:t>
             </a:r>
             <a:endParaRPr lang="en-US" sz="950" dirty="0"/>
           </a:p>
@@ -3242,7 +3242,7 @@
                 <a:ea typeface="Pretendard" pitchFamily="34" charset="-122"/>
                 <a:cs typeface="Pretendard" pitchFamily="34" charset="-120"/>
               </a:rPr>
-              <a:t>WEEK 07</a:t>
+              <a:t>WEEK 08</a:t>
             </a:r>
             <a:endParaRPr lang="en-US" sz="900" dirty="0"/>
           </a:p>
@@ -3615,7 +3615,7 @@
                 <a:ea typeface="Pretendard" pitchFamily="34" charset="-122"/>
                 <a:cs typeface="Pretendard" pitchFamily="34" charset="-120"/>
               </a:rPr>
-              <a:t>패널 게재 — 지금은 후보로. 12주차에 확정합니다</a:t>
+              <a:t>패널 게재 — 지금은 후보로. 13주차에 확정합니다</a:t>
             </a:r>
             <a:endParaRPr lang="en-US" sz="1200" dirty="0"/>
           </a:p>
@@ -3885,7 +3885,7 @@
                 <a:ea typeface="Pretendard" pitchFamily="34" charset="-122"/>
                 <a:cs typeface="Pretendard" pitchFamily="34" charset="-120"/>
               </a:rPr>
-              <a:t>네 번째 칸을 정직하게 쓰세요. '없음'을 안 적으면 작업량이 보이지 않고, 11주차에 한꺼번에 몰립니다.</a:t>
+              <a:t>네 번째 칸을 정직하게 쓰세요. '없음'을 안 적으면 작업량이 보이지 않고, 막판에 한꺼번에 몰립니다.</a:t>
             </a:r>
             <a:endParaRPr lang="en-US" sz="1200" dirty="0"/>
           </a:p>
@@ -3949,7 +3949,7 @@
                 <a:ea typeface="Pretendard" pitchFamily="34" charset="-122"/>
                 <a:cs typeface="Pretendard" pitchFamily="34" charset="-120"/>
               </a:rPr>
-              <a:t>서비스디자인 · 7주차 흐름 늘리기 — 겹치는 화면 정리</a:t>
+              <a:t>서비스디자인 · 8주차 흐름 늘리기 — 겹치는 화면 정리</a:t>
             </a:r>
             <a:endParaRPr lang="en-US" sz="850" dirty="0"/>
           </a:p>
@@ -4137,7 +4137,7 @@
                 <a:ea typeface="Pretendard" pitchFamily="34" charset="-122"/>
                 <a:cs typeface="Pretendard" pitchFamily="34" charset="-120"/>
               </a:rPr>
-              <a:t>WEEK 07</a:t>
+              <a:t>WEEK 08</a:t>
             </a:r>
             <a:endParaRPr lang="en-US" sz="900" dirty="0"/>
           </a:p>
@@ -4767,7 +4767,7 @@
                 <a:ea typeface="Pretendard" pitchFamily="34" charset="-122"/>
                 <a:cs typeface="Pretendard" pitchFamily="34" charset="-120"/>
               </a:rPr>
-              <a:t>서비스디자인 · 7주차 흐름 늘리기 — 겹치는 화면 정리</a:t>
+              <a:t>서비스디자인 · 8주차 흐름 늘리기 — 겹치는 화면 정리</a:t>
             </a:r>
             <a:endParaRPr lang="en-US" sz="850" dirty="0"/>
           </a:p>
@@ -4955,7 +4955,7 @@
                 <a:ea typeface="Pretendard" pitchFamily="34" charset="-122"/>
                 <a:cs typeface="Pretendard" pitchFamily="34" charset="-120"/>
               </a:rPr>
-              <a:t>WEEK 07</a:t>
+              <a:t>WEEK 08</a:t>
             </a:r>
             <a:endParaRPr lang="en-US" sz="900" dirty="0"/>
           </a:p>
@@ -5166,7 +5166,7 @@
                 <a:ea typeface="Pretendard SemiBold" pitchFamily="34" charset="-122"/>
                 <a:cs typeface="Pretendard SemiBold" pitchFamily="34" charset="-120"/>
               </a:rPr>
-              <a:t>중간 보고서 — 8주차 평가</a:t>
+              <a:t>중간 보고서 — 10/28 중간평가</a:t>
             </a:r>
             <a:endParaRPr lang="en-US" sz="4600" dirty="0"/>
           </a:p>
@@ -5421,7 +5421,7 @@
                 <a:ea typeface="Pretendard" pitchFamily="34" charset="-122"/>
                 <a:cs typeface="Pretendard" pitchFamily="34" charset="-120"/>
               </a:rPr>
-              <a:t>WEEK 07</a:t>
+              <a:t>WEEK 08</a:t>
             </a:r>
             <a:endParaRPr lang="en-US" sz="900" dirty="0"/>
           </a:p>
@@ -5881,7 +5881,7 @@
                 <a:ea typeface="Pretendard" pitchFamily="34" charset="-122"/>
                 <a:cs typeface="Pretendard" pitchFamily="34" charset="-120"/>
               </a:rPr>
-              <a:t>기준 폭 · GNB · 헤더 · 리스트 · 카드 · 아이콘 · 입력 · 버튼 · 세그먼트 탭. 3~5주차에 쌓은 것.</a:t>
+              <a:t>기준 폭 · GNB · 헤더 · 리스트 · 카드 · 아이콘 · 입력 · 버튼 · 세그먼트 탭. 3~6주차에 쌓은 것.</a:t>
             </a:r>
             <a:endParaRPr lang="en-US" sz="1150" dirty="0"/>
           </a:p>
@@ -5987,7 +5987,7 @@
                 <a:ea typeface="Pretendard" pitchFamily="34" charset="-122"/>
                 <a:cs typeface="Pretendard" pitchFamily="34" charset="-120"/>
               </a:rPr>
-              <a:t>색 · 글자 · 간격. 값과 이름과 쓰는 자리까지. 4주차 것.</a:t>
+              <a:t>색 · 글자 · 간격. 값과 이름과 쓰는 자리까지. 5주차 것.</a:t>
             </a:r>
             <a:endParaRPr lang="en-US" sz="1150" dirty="0"/>
           </a:p>
@@ -6411,7 +6411,7 @@
                 <a:ea typeface="Pretendard" pitchFamily="34" charset="-122"/>
                 <a:cs typeface="Pretendard" pitchFamily="34" charset="-120"/>
               </a:rPr>
-              <a:t>9~15주차에 무엇을 언제. '없음' 개수를 주차로 나누면 나옵니다.</a:t>
+              <a:t>10~15주차에 무엇을 언제. '없음' 개수를 주차로 나누면 나옵니다.</a:t>
             </a:r>
             <a:endParaRPr lang="en-US" sz="1150" dirty="0"/>
           </a:p>
@@ -6475,7 +6475,7 @@
                 <a:ea typeface="Pretendard" pitchFamily="34" charset="-122"/>
                 <a:cs typeface="Pretendard" pitchFamily="34" charset="-120"/>
               </a:rPr>
-              <a:t>서비스디자인 · 7주차 흐름 늘리기 — 겹치는 화면 정리</a:t>
+              <a:t>서비스디자인 · 8주차 흐름 늘리기 — 겹치는 화면 정리</a:t>
             </a:r>
             <a:endParaRPr lang="en-US" sz="850" dirty="0"/>
           </a:p>
@@ -6663,7 +6663,7 @@
                 <a:ea typeface="Pretendard" pitchFamily="34" charset="-122"/>
                 <a:cs typeface="Pretendard" pitchFamily="34" charset="-120"/>
               </a:rPr>
-              <a:t>WEEK 07</a:t>
+              <a:t>WEEK 08</a:t>
             </a:r>
             <a:endParaRPr lang="en-US" sz="900" dirty="0"/>
           </a:p>
@@ -7243,7 +7243,7 @@
                 <a:ea typeface="Pretendard" pitchFamily="34" charset="-122"/>
                 <a:cs typeface="Pretendard" pitchFamily="34" charset="-120"/>
               </a:rPr>
-              <a:t>8주차는 1인 10분 검토와 질의 — 발표 준비는 하지 않습니다</a:t>
+              <a:t>중간평가는 1인 10분 검토와 질의 — 발표 준비는 하지 않습니다</a:t>
             </a:r>
             <a:endParaRPr lang="en-US" sz="1200" dirty="0"/>
           </a:p>
@@ -7346,7 +7346,7 @@
                 <a:ea typeface="Pretendard" pitchFamily="34" charset="-122"/>
                 <a:cs typeface="Pretendard" pitchFamily="34" charset="-120"/>
               </a:rPr>
-              <a:t>서비스디자인 · 7주차 흐름 늘리기 — 겹치는 화면 정리</a:t>
+              <a:t>서비스디자인 · 8주차 흐름 늘리기 — 겹치는 화면 정리</a:t>
             </a:r>
             <a:endParaRPr lang="en-US" sz="850" dirty="0"/>
           </a:p>
@@ -7534,7 +7534,7 @@
                 <a:ea typeface="Pretendard" pitchFamily="34" charset="-122"/>
                 <a:cs typeface="Pretendard" pitchFamily="34" charset="-120"/>
               </a:rPr>
-              <a:t>WEEK 07</a:t>
+              <a:t>WEEK 08</a:t>
             </a:r>
             <a:endParaRPr lang="en-US" sz="900" dirty="0"/>
           </a:p>
@@ -8129,7 +8129,7 @@
                 <a:ea typeface="Pretendard" pitchFamily="34" charset="-122"/>
                 <a:cs typeface="Pretendard" pitchFamily="34" charset="-120"/>
               </a:rPr>
-              <a:t>복제본을 지금 정리하지 않으면 9주차부터 하나를 고칠 때마다 셋을 찾아 고치게 됩니다.</a:t>
+              <a:t>복제본을 지금 정리하지 않으면 중간평가 뒤부터 하나를 고칠 때마다 셋을 찾아 고치게 됩니다.</a:t>
             </a:r>
             <a:endParaRPr lang="en-US" sz="1200" dirty="0"/>
           </a:p>
@@ -8193,7 +8193,7 @@
                 <a:ea typeface="Pretendard" pitchFamily="34" charset="-122"/>
                 <a:cs typeface="Pretendard" pitchFamily="34" charset="-120"/>
               </a:rPr>
-              <a:t>서비스디자인 · 7주차 흐름 늘리기 — 겹치는 화면 정리</a:t>
+              <a:t>서비스디자인 · 8주차 흐름 늘리기 — 겹치는 화면 정리</a:t>
             </a:r>
             <a:endParaRPr lang="en-US" sz="850" dirty="0"/>
           </a:p>
@@ -8381,7 +8381,7 @@
                 <a:ea typeface="Pretendard" pitchFamily="34" charset="-122"/>
                 <a:cs typeface="Pretendard" pitchFamily="34" charset="-120"/>
               </a:rPr>
-              <a:t>WEEK 07</a:t>
+              <a:t>WEEK 08</a:t>
             </a:r>
             <a:endParaRPr lang="en-US" sz="900" dirty="0"/>
           </a:p>
@@ -8523,7 +8523,7 @@
                 <a:ea typeface="Pretendard" pitchFamily="34" charset="-122"/>
                 <a:cs typeface="Pretendard" pitchFamily="34" charset="-120"/>
               </a:rPr>
-              <a:t>다음 주는 중간평가입니다. 9주차부터 남은 흐름을 채웁니다.</a:t>
+              <a:t>다음 주 10/28이 중간평가입니다. 그다음 주부터 남은 흐름을 채웁니다.</a:t>
             </a:r>
             <a:endParaRPr lang="en-US" sz="1150" dirty="0"/>
           </a:p>
@@ -10699,7 +10699,7 @@
                 <a:ea typeface="Pretendard" pitchFamily="34" charset="-122"/>
                 <a:cs typeface="Pretendard" pitchFamily="34" charset="-120"/>
               </a:rPr>
-              <a:t>남은 일정이 9~15주차로 나뉘어 주차별 작업량으로 적혀 있다</a:t>
+              <a:t>남은 일정이 10~15주차로 나뉘어 주차별 작업량으로 적혀 있다</a:t>
             </a:r>
             <a:endParaRPr lang="en-US" sz="1050" dirty="0"/>
           </a:p>
@@ -10955,7 +10955,7 @@
                 <a:ea typeface="Pretendard" pitchFamily="34" charset="-122"/>
                 <a:cs typeface="Pretendard" pitchFamily="34" charset="-120"/>
               </a:rPr>
-              <a:t>서비스디자인 · 7주차 흐름 늘리기 — 겹치는 화면 정리</a:t>
+              <a:t>서비스디자인 · 8주차 흐름 늘리기 — 겹치는 화면 정리</a:t>
             </a:r>
             <a:endParaRPr lang="en-US" sz="850" dirty="0"/>
           </a:p>
@@ -11143,7 +11143,7 @@
                 <a:ea typeface="Pretendard" pitchFamily="34" charset="-122"/>
                 <a:cs typeface="Pretendard" pitchFamily="34" charset="-120"/>
               </a:rPr>
-              <a:t>WEEK 07</a:t>
+              <a:t>WEEK 08</a:t>
             </a:r>
             <a:endParaRPr lang="en-US" sz="900" dirty="0"/>
           </a:p>
@@ -11285,7 +11285,7 @@
                 <a:ea typeface="Pretendard" pitchFamily="34" charset="-122"/>
                 <a:cs typeface="Pretendard" pitchFamily="34" charset="-120"/>
               </a:rPr>
-              <a:t>다음 주는 중간평가입니다. 9주차부터 남은 흐름을 채웁니다.</a:t>
+              <a:t>다음 주 10/28이 중간평가입니다. 그다음 주부터 남은 흐름을 채웁니다.</a:t>
             </a:r>
             <a:endParaRPr lang="en-US" sz="1150" dirty="0"/>
           </a:p>
@@ -11962,7 +11962,7 @@
                 <a:ea typeface="Pretendard Light" pitchFamily="34" charset="-122"/>
                 <a:cs typeface="Pretendard Light" pitchFamily="34" charset="-120"/>
               </a:rPr>
-              <a:t>08주차</a:t>
+              <a:t>09주차</a:t>
             </a:r>
             <a:endParaRPr lang="en-US" sz="2600" dirty="0"/>
           </a:p>
@@ -12317,7 +12317,7 @@
                 <a:ea typeface="Pretendard" pitchFamily="34" charset="-122"/>
                 <a:cs typeface="Pretendard" pitchFamily="34" charset="-120"/>
               </a:rPr>
-              <a:t>서비스디자인 · 7주차 흐름 늘리기 — 겹치는 화면 정리</a:t>
+              <a:t>서비스디자인 · 8주차 흐름 늘리기 — 겹치는 화면 정리</a:t>
             </a:r>
             <a:endParaRPr lang="en-US" sz="850" dirty="0"/>
           </a:p>
@@ -12505,7 +12505,7 @@
                 <a:ea typeface="Pretendard" pitchFamily="34" charset="-122"/>
                 <a:cs typeface="Pretendard" pitchFamily="34" charset="-120"/>
               </a:rPr>
-              <a:t>WEEK 07</a:t>
+              <a:t>WEEK 08</a:t>
             </a:r>
             <a:endParaRPr lang="en-US" sz="900" dirty="0"/>
           </a:p>
@@ -12971,7 +12971,7 @@
                 <a:ea typeface="Pretendard" pitchFamily="34" charset="-122"/>
                 <a:cs typeface="Pretendard" pitchFamily="34" charset="-120"/>
               </a:rPr>
-              <a:t>WEEK 07</a:t>
+              <a:t>WEEK 08</a:t>
             </a:r>
             <a:endParaRPr lang="en-US" sz="900" dirty="0"/>
           </a:p>
@@ -13862,7 +13862,7 @@
                 <a:ea typeface="Pretendard" pitchFamily="34" charset="-122"/>
                 <a:cs typeface="Pretendard" pitchFamily="34" charset="-120"/>
               </a:rPr>
-              <a:t>서비스디자인 · 7주차 흐름 늘리기 — 겹치는 화면 정리</a:t>
+              <a:t>서비스디자인 · 8주차 흐름 늘리기 — 겹치는 화면 정리</a:t>
             </a:r>
             <a:endParaRPr lang="en-US" sz="850" dirty="0"/>
           </a:p>
@@ -14050,7 +14050,7 @@
                 <a:ea typeface="Pretendard" pitchFamily="34" charset="-122"/>
                 <a:cs typeface="Pretendard" pitchFamily="34" charset="-120"/>
               </a:rPr>
-              <a:t>WEEK 07</a:t>
+              <a:t>WEEK 08</a:t>
             </a:r>
             <a:endParaRPr lang="en-US" sz="900" dirty="0"/>
           </a:p>
@@ -14902,7 +14902,7 @@
                 <a:ea typeface="Pretendard" pitchFamily="34" charset="-122"/>
                 <a:cs typeface="Pretendard" pitchFamily="34" charset="-120"/>
               </a:rPr>
-              <a:t>서비스디자인 · 7주차 흐름 늘리기 — 겹치는 화면 정리</a:t>
+              <a:t>서비스디자인 · 8주차 흐름 늘리기 — 겹치는 화면 정리</a:t>
             </a:r>
             <a:endParaRPr lang="en-US" sz="850" dirty="0"/>
           </a:p>
@@ -15090,7 +15090,7 @@
                 <a:ea typeface="Pretendard" pitchFamily="34" charset="-122"/>
                 <a:cs typeface="Pretendard" pitchFamily="34" charset="-120"/>
               </a:rPr>
-              <a:t>WEEK 07</a:t>
+              <a:t>WEEK 08</a:t>
             </a:r>
             <a:endParaRPr lang="en-US" sz="900" dirty="0"/>
           </a:p>
@@ -15556,7 +15556,7 @@
                 <a:ea typeface="Pretendard" pitchFamily="34" charset="-122"/>
                 <a:cs typeface="Pretendard" pitchFamily="34" charset="-120"/>
               </a:rPr>
-              <a:t>WEEK 07</a:t>
+              <a:t>WEEK 08</a:t>
             </a:r>
             <a:endParaRPr lang="en-US" sz="900" dirty="0"/>
           </a:p>
@@ -15850,7 +15850,7 @@
                 <a:ea typeface="Pretendard" pitchFamily="34" charset="-122"/>
                 <a:cs typeface="Pretendard" pitchFamily="34" charset="-120"/>
               </a:rPr>
-              <a:t>서비스디자인 · 7주차 흐름 늘리기 — 겹치는 화면 정리</a:t>
+              <a:t>서비스디자인 · 8주차 흐름 늘리기 — 겹치는 화면 정리</a:t>
             </a:r>
             <a:endParaRPr lang="en-US" sz="850" dirty="0"/>
           </a:p>
@@ -16038,7 +16038,7 @@
                 <a:ea typeface="Pretendard" pitchFamily="34" charset="-122"/>
                 <a:cs typeface="Pretendard" pitchFamily="34" charset="-120"/>
               </a:rPr>
-              <a:t>WEEK 07</a:t>
+              <a:t>WEEK 08</a:t>
             </a:r>
             <a:endParaRPr lang="en-US" sz="900" dirty="0"/>
           </a:p>
@@ -17135,7 +17135,7 @@
                 <a:ea typeface="Pretendard" pitchFamily="34" charset="-122"/>
                 <a:cs typeface="Pretendard" pitchFamily="34" charset="-120"/>
               </a:rPr>
-              <a:t>서비스디자인 · 7주차 흐름 늘리기 — 겹치는 화면 정리</a:t>
+              <a:t>서비스디자인 · 8주차 흐름 늘리기 — 겹치는 화면 정리</a:t>
             </a:r>
             <a:endParaRPr lang="en-US" sz="850" dirty="0"/>
           </a:p>
@@ -17323,7 +17323,7 @@
                 <a:ea typeface="Pretendard" pitchFamily="34" charset="-122"/>
                 <a:cs typeface="Pretendard" pitchFamily="34" charset="-120"/>
               </a:rPr>
-              <a:t>WEEK 07</a:t>
+              <a:t>WEEK 08</a:t>
             </a:r>
             <a:endParaRPr lang="en-US" sz="900" dirty="0"/>
           </a:p>
@@ -18667,7 +18667,7 @@
                 <a:ea typeface="Pretendard" pitchFamily="34" charset="-122"/>
                 <a:cs typeface="Pretendard" pitchFamily="34" charset="-120"/>
               </a:rPr>
-              <a:t>서비스디자인 · 7주차 흐름 늘리기 — 겹치는 화면 정리</a:t>
+              <a:t>서비스디자인 · 8주차 흐름 늘리기 — 겹치는 화면 정리</a:t>
             </a:r>
             <a:endParaRPr lang="en-US" sz="850" dirty="0"/>
           </a:p>
@@ -18855,7 +18855,7 @@
                 <a:ea typeface="Pretendard" pitchFamily="34" charset="-122"/>
                 <a:cs typeface="Pretendard" pitchFamily="34" charset="-120"/>
               </a:rPr>
-              <a:t>WEEK 07</a:t>
+              <a:t>WEEK 08</a:t>
             </a:r>
             <a:endParaRPr lang="en-US" sz="900" dirty="0"/>
           </a:p>
